--- a/m9/diapositivos/sessao-05-m9-f10.pptx
+++ b/m9/diapositivos/sessao-05-m9-f10.pptx
@@ -2601,7 +2601,287 @@
                 <a:ea typeface="Georgia" pitchFamily="34" charset="-122"/>
                 <a:cs typeface="Georgia" pitchFamily="34" charset="-120"/>
               </a:rPr>
-              <a:t>Um debate é uma discussão com regras. Há uma moção, que é a frase que se discute; duas equipas, uma a favor e outra contra; e um moderador, que dá a palavra e conta o tempo. Cada equipa abre (diz a posição), argumenta (dá razões com prova), refuta (responde ao que a outra disse) e fecha.</a:t>
+              <a:t>Um </a:t>
+            </a:r>
+            <a:pPr indent="0" marL="0">
+              <a:lnSpc>
+                <a:spcPct val="120000"/>
+              </a:lnSpc>
+              <a:spcAft>
+                <a:spcPts val="1000"/>
+              </a:spcAft>
+              <a:buNone/>
+            </a:pPr>
+            <a:r>
+              <a:rPr lang="en-US" sz="2300" b="1" dirty="0">
+                <a:solidFill>
+                  <a:srgbClr val="F2F0EA"/>
+                </a:solidFill>
+                <a:latin typeface="Georgia" pitchFamily="34" charset="0"/>
+                <a:ea typeface="Georgia" pitchFamily="34" charset="-122"/>
+                <a:cs typeface="Georgia" pitchFamily="34" charset="-120"/>
+              </a:rPr>
+              <a:t>debate</a:t>
+            </a:r>
+            <a:pPr indent="0" marL="0">
+              <a:lnSpc>
+                <a:spcPct val="120000"/>
+              </a:lnSpc>
+              <a:spcAft>
+                <a:spcPts val="1000"/>
+              </a:spcAft>
+              <a:buNone/>
+            </a:pPr>
+            <a:r>
+              <a:rPr lang="en-US" sz="2300" dirty="0">
+                <a:solidFill>
+                  <a:srgbClr val="F2F0EA"/>
+                </a:solidFill>
+                <a:latin typeface="Georgia" pitchFamily="34" charset="0"/>
+                <a:ea typeface="Georgia" pitchFamily="34" charset="-122"/>
+                <a:cs typeface="Georgia" pitchFamily="34" charset="-120"/>
+              </a:rPr>
+              <a:t> é uma discussão com regras. Há uma </a:t>
+            </a:r>
+            <a:pPr indent="0" marL="0">
+              <a:lnSpc>
+                <a:spcPct val="120000"/>
+              </a:lnSpc>
+              <a:spcAft>
+                <a:spcPts val="1000"/>
+              </a:spcAft>
+              <a:buNone/>
+            </a:pPr>
+            <a:r>
+              <a:rPr lang="en-US" sz="2300" b="1" dirty="0">
+                <a:solidFill>
+                  <a:srgbClr val="F2F0EA"/>
+                </a:solidFill>
+                <a:latin typeface="Georgia" pitchFamily="34" charset="0"/>
+                <a:ea typeface="Georgia" pitchFamily="34" charset="-122"/>
+                <a:cs typeface="Georgia" pitchFamily="34" charset="-120"/>
+              </a:rPr>
+              <a:t>moção</a:t>
+            </a:r>
+            <a:pPr indent="0" marL="0">
+              <a:lnSpc>
+                <a:spcPct val="120000"/>
+              </a:lnSpc>
+              <a:spcAft>
+                <a:spcPts val="1000"/>
+              </a:spcAft>
+              <a:buNone/>
+            </a:pPr>
+            <a:r>
+              <a:rPr lang="en-US" sz="2300" dirty="0">
+                <a:solidFill>
+                  <a:srgbClr val="F2F0EA"/>
+                </a:solidFill>
+                <a:latin typeface="Georgia" pitchFamily="34" charset="0"/>
+                <a:ea typeface="Georgia" pitchFamily="34" charset="-122"/>
+                <a:cs typeface="Georgia" pitchFamily="34" charset="-120"/>
+              </a:rPr>
+              <a:t>, que é a frase que se discute; duas equipas, uma a favor e outra contra; e um </a:t>
+            </a:r>
+            <a:pPr indent="0" marL="0">
+              <a:lnSpc>
+                <a:spcPct val="120000"/>
+              </a:lnSpc>
+              <a:spcAft>
+                <a:spcPts val="1000"/>
+              </a:spcAft>
+              <a:buNone/>
+            </a:pPr>
+            <a:r>
+              <a:rPr lang="en-US" sz="2300" b="1" dirty="0">
+                <a:solidFill>
+                  <a:srgbClr val="F2F0EA"/>
+                </a:solidFill>
+                <a:latin typeface="Georgia" pitchFamily="34" charset="0"/>
+                <a:ea typeface="Georgia" pitchFamily="34" charset="-122"/>
+                <a:cs typeface="Georgia" pitchFamily="34" charset="-120"/>
+              </a:rPr>
+              <a:t>moderador</a:t>
+            </a:r>
+            <a:pPr indent="0" marL="0">
+              <a:lnSpc>
+                <a:spcPct val="120000"/>
+              </a:lnSpc>
+              <a:spcAft>
+                <a:spcPts val="1000"/>
+              </a:spcAft>
+              <a:buNone/>
+            </a:pPr>
+            <a:r>
+              <a:rPr lang="en-US" sz="2300" dirty="0">
+                <a:solidFill>
+                  <a:srgbClr val="F2F0EA"/>
+                </a:solidFill>
+                <a:latin typeface="Georgia" pitchFamily="34" charset="0"/>
+                <a:ea typeface="Georgia" pitchFamily="34" charset="-122"/>
+                <a:cs typeface="Georgia" pitchFamily="34" charset="-120"/>
+              </a:rPr>
+              <a:t>, que dá a palavra e conta o tempo. Cada equipa </a:t>
+            </a:r>
+            <a:pPr indent="0" marL="0">
+              <a:lnSpc>
+                <a:spcPct val="120000"/>
+              </a:lnSpc>
+              <a:spcAft>
+                <a:spcPts val="1000"/>
+              </a:spcAft>
+              <a:buNone/>
+            </a:pPr>
+            <a:r>
+              <a:rPr lang="en-US" sz="2300" b="1" dirty="0">
+                <a:solidFill>
+                  <a:srgbClr val="F2F0EA"/>
+                </a:solidFill>
+                <a:latin typeface="Georgia" pitchFamily="34" charset="0"/>
+                <a:ea typeface="Georgia" pitchFamily="34" charset="-122"/>
+                <a:cs typeface="Georgia" pitchFamily="34" charset="-120"/>
+              </a:rPr>
+              <a:t>abre</a:t>
+            </a:r>
+            <a:pPr indent="0" marL="0">
+              <a:lnSpc>
+                <a:spcPct val="120000"/>
+              </a:lnSpc>
+              <a:spcAft>
+                <a:spcPts val="1000"/>
+              </a:spcAft>
+              <a:buNone/>
+            </a:pPr>
+            <a:r>
+              <a:rPr lang="en-US" sz="2300" dirty="0">
+                <a:solidFill>
+                  <a:srgbClr val="F2F0EA"/>
+                </a:solidFill>
+                <a:latin typeface="Georgia" pitchFamily="34" charset="0"/>
+                <a:ea typeface="Georgia" pitchFamily="34" charset="-122"/>
+                <a:cs typeface="Georgia" pitchFamily="34" charset="-120"/>
+              </a:rPr>
+              <a:t> (diz a posição), </a:t>
+            </a:r>
+            <a:pPr indent="0" marL="0">
+              <a:lnSpc>
+                <a:spcPct val="120000"/>
+              </a:lnSpc>
+              <a:spcAft>
+                <a:spcPts val="1000"/>
+              </a:spcAft>
+              <a:buNone/>
+            </a:pPr>
+            <a:r>
+              <a:rPr lang="en-US" sz="2300" b="1" dirty="0">
+                <a:solidFill>
+                  <a:srgbClr val="F2F0EA"/>
+                </a:solidFill>
+                <a:latin typeface="Georgia" pitchFamily="34" charset="0"/>
+                <a:ea typeface="Georgia" pitchFamily="34" charset="-122"/>
+                <a:cs typeface="Georgia" pitchFamily="34" charset="-120"/>
+              </a:rPr>
+              <a:t>argumenta</a:t>
+            </a:r>
+            <a:pPr indent="0" marL="0">
+              <a:lnSpc>
+                <a:spcPct val="120000"/>
+              </a:lnSpc>
+              <a:spcAft>
+                <a:spcPts val="1000"/>
+              </a:spcAft>
+              <a:buNone/>
+            </a:pPr>
+            <a:r>
+              <a:rPr lang="en-US" sz="2300" dirty="0">
+                <a:solidFill>
+                  <a:srgbClr val="F2F0EA"/>
+                </a:solidFill>
+                <a:latin typeface="Georgia" pitchFamily="34" charset="0"/>
+                <a:ea typeface="Georgia" pitchFamily="34" charset="-122"/>
+                <a:cs typeface="Georgia" pitchFamily="34" charset="-120"/>
+              </a:rPr>
+              <a:t> (dá razões com prova), </a:t>
+            </a:r>
+            <a:pPr indent="0" marL="0">
+              <a:lnSpc>
+                <a:spcPct val="120000"/>
+              </a:lnSpc>
+              <a:spcAft>
+                <a:spcPts val="1000"/>
+              </a:spcAft>
+              <a:buNone/>
+            </a:pPr>
+            <a:r>
+              <a:rPr lang="en-US" sz="2300" b="1" dirty="0">
+                <a:solidFill>
+                  <a:srgbClr val="F2F0EA"/>
+                </a:solidFill>
+                <a:latin typeface="Georgia" pitchFamily="34" charset="0"/>
+                <a:ea typeface="Georgia" pitchFamily="34" charset="-122"/>
+                <a:cs typeface="Georgia" pitchFamily="34" charset="-120"/>
+              </a:rPr>
+              <a:t>refuta</a:t>
+            </a:r>
+            <a:pPr indent="0" marL="0">
+              <a:lnSpc>
+                <a:spcPct val="120000"/>
+              </a:lnSpc>
+              <a:spcAft>
+                <a:spcPts val="1000"/>
+              </a:spcAft>
+              <a:buNone/>
+            </a:pPr>
+            <a:r>
+              <a:rPr lang="en-US" sz="2300" dirty="0">
+                <a:solidFill>
+                  <a:srgbClr val="F2F0EA"/>
+                </a:solidFill>
+                <a:latin typeface="Georgia" pitchFamily="34" charset="0"/>
+                <a:ea typeface="Georgia" pitchFamily="34" charset="-122"/>
+                <a:cs typeface="Georgia" pitchFamily="34" charset="-120"/>
+              </a:rPr>
+              <a:t> (responde ao que a outra disse) e </a:t>
+            </a:r>
+            <a:pPr indent="0" marL="0">
+              <a:lnSpc>
+                <a:spcPct val="120000"/>
+              </a:lnSpc>
+              <a:spcAft>
+                <a:spcPts val="1000"/>
+              </a:spcAft>
+              <a:buNone/>
+            </a:pPr>
+            <a:r>
+              <a:rPr lang="en-US" sz="2300" b="1" dirty="0">
+                <a:solidFill>
+                  <a:srgbClr val="F2F0EA"/>
+                </a:solidFill>
+                <a:latin typeface="Georgia" pitchFamily="34" charset="0"/>
+                <a:ea typeface="Georgia" pitchFamily="34" charset="-122"/>
+                <a:cs typeface="Georgia" pitchFamily="34" charset="-120"/>
+              </a:rPr>
+              <a:t>fecha</a:t>
+            </a:r>
+            <a:pPr indent="0" marL="0">
+              <a:lnSpc>
+                <a:spcPct val="120000"/>
+              </a:lnSpc>
+              <a:spcAft>
+                <a:spcPts val="1000"/>
+              </a:spcAft>
+              <a:buNone/>
+            </a:pPr>
+            <a:r>
+              <a:rPr lang="en-US" sz="2300" dirty="0">
+                <a:solidFill>
+                  <a:srgbClr val="F2F0EA"/>
+                </a:solidFill>
+                <a:latin typeface="Georgia" pitchFamily="34" charset="0"/>
+                <a:ea typeface="Georgia" pitchFamily="34" charset="-122"/>
+                <a:cs typeface="Georgia" pitchFamily="34" charset="-120"/>
+              </a:rPr>
+              <a:t>.</a:t>
             </a:r>
             <a:endParaRPr lang="en-US" sz="2300" dirty="0"/>
           </a:p>
@@ -4880,7 +5160,7 @@
               <a:buNone/>
             </a:pPr>
             <a:r>
-              <a:rPr lang="en-US" sz="2300" dirty="0">
+              <a:rPr lang="en-US" sz="2300" b="1" dirty="0">
                 <a:solidFill>
                   <a:srgbClr val="F2F0EA"/>
                 </a:solidFill>
@@ -4888,11 +5168,8 @@
                 <a:ea typeface="Georgia" pitchFamily="34" charset="-122"/>
                 <a:cs typeface="Georgia" pitchFamily="34" charset="-120"/>
               </a:rPr>
-              <a:t>Tese: a posição que se defende.</a:t>
-            </a:r>
-            <a:endParaRPr lang="en-US" sz="2300" dirty="0"/>
-          </a:p>
-          <a:p>
+              <a:t>Tese</a:t>
+            </a:r>
             <a:pPr indent="0" marL="0">
               <a:lnSpc>
                 <a:spcPct val="120000"/>
@@ -4911,11 +5188,8 @@
                 <a:ea typeface="Georgia" pitchFamily="34" charset="-122"/>
                 <a:cs typeface="Georgia" pitchFamily="34" charset="-120"/>
               </a:rPr>
-              <a:t>Argumento: uma razão, com prova.</a:t>
-            </a:r>
-            <a:endParaRPr lang="en-US" sz="2300" dirty="0"/>
-          </a:p>
-          <a:p>
+              <a:t>: a posição que se defende. </a:t>
+            </a:r>
             <a:pPr indent="0" marL="0">
               <a:lnSpc>
                 <a:spcPct val="120000"/>
@@ -4926,7 +5200,7 @@
               <a:buNone/>
             </a:pPr>
             <a:r>
-              <a:rPr lang="en-US" sz="2300" dirty="0">
+              <a:rPr lang="en-US" sz="2300" b="1" dirty="0">
                 <a:solidFill>
                   <a:srgbClr val="F2F0EA"/>
                 </a:solidFill>
@@ -4934,11 +5208,8 @@
                 <a:ea typeface="Georgia" pitchFamily="34" charset="-122"/>
                 <a:cs typeface="Georgia" pitchFamily="34" charset="-120"/>
               </a:rPr>
-              <a:t>Contra-argumento: a razão de quem discorda.</a:t>
-            </a:r>
-            <a:endParaRPr lang="en-US" sz="2300" dirty="0"/>
-          </a:p>
-          <a:p>
+              <a:t>Argumento</a:t>
+            </a:r>
             <a:pPr indent="0" marL="0">
               <a:lnSpc>
                 <a:spcPct val="120000"/>
@@ -4957,7 +5228,87 @@
                 <a:ea typeface="Georgia" pitchFamily="34" charset="-122"/>
                 <a:cs typeface="Georgia" pitchFamily="34" charset="-120"/>
               </a:rPr>
-              <a:t>Refutação: a resposta a essa razão.</a:t>
+              <a:t>: uma razão, com prova. </a:t>
+            </a:r>
+            <a:pPr indent="0" marL="0">
+              <a:lnSpc>
+                <a:spcPct val="120000"/>
+              </a:lnSpc>
+              <a:spcAft>
+                <a:spcPts val="1000"/>
+              </a:spcAft>
+              <a:buNone/>
+            </a:pPr>
+            <a:r>
+              <a:rPr lang="en-US" sz="2300" b="1" dirty="0">
+                <a:solidFill>
+                  <a:srgbClr val="F2F0EA"/>
+                </a:solidFill>
+                <a:latin typeface="Georgia" pitchFamily="34" charset="0"/>
+                <a:ea typeface="Georgia" pitchFamily="34" charset="-122"/>
+                <a:cs typeface="Georgia" pitchFamily="34" charset="-120"/>
+              </a:rPr>
+              <a:t>Contra-argumento</a:t>
+            </a:r>
+            <a:pPr indent="0" marL="0">
+              <a:lnSpc>
+                <a:spcPct val="120000"/>
+              </a:lnSpc>
+              <a:spcAft>
+                <a:spcPts val="1000"/>
+              </a:spcAft>
+              <a:buNone/>
+            </a:pPr>
+            <a:r>
+              <a:rPr lang="en-US" sz="2300" dirty="0">
+                <a:solidFill>
+                  <a:srgbClr val="F2F0EA"/>
+                </a:solidFill>
+                <a:latin typeface="Georgia" pitchFamily="34" charset="0"/>
+                <a:ea typeface="Georgia" pitchFamily="34" charset="-122"/>
+                <a:cs typeface="Georgia" pitchFamily="34" charset="-120"/>
+              </a:rPr>
+              <a:t>: a razão de quem discorda. </a:t>
+            </a:r>
+            <a:pPr indent="0" marL="0">
+              <a:lnSpc>
+                <a:spcPct val="120000"/>
+              </a:lnSpc>
+              <a:spcAft>
+                <a:spcPts val="1000"/>
+              </a:spcAft>
+              <a:buNone/>
+            </a:pPr>
+            <a:r>
+              <a:rPr lang="en-US" sz="2300" b="1" dirty="0">
+                <a:solidFill>
+                  <a:srgbClr val="F2F0EA"/>
+                </a:solidFill>
+                <a:latin typeface="Georgia" pitchFamily="34" charset="0"/>
+                <a:ea typeface="Georgia" pitchFamily="34" charset="-122"/>
+                <a:cs typeface="Georgia" pitchFamily="34" charset="-120"/>
+              </a:rPr>
+              <a:t>Refutação</a:t>
+            </a:r>
+            <a:pPr indent="0" marL="0">
+              <a:lnSpc>
+                <a:spcPct val="120000"/>
+              </a:lnSpc>
+              <a:spcAft>
+                <a:spcPts val="1000"/>
+              </a:spcAft>
+              <a:buNone/>
+            </a:pPr>
+            <a:r>
+              <a:rPr lang="en-US" sz="2300" dirty="0">
+                <a:solidFill>
+                  <a:srgbClr val="F2F0EA"/>
+                </a:solidFill>
+                <a:latin typeface="Georgia" pitchFamily="34" charset="0"/>
+                <a:ea typeface="Georgia" pitchFamily="34" charset="-122"/>
+                <a:cs typeface="Georgia" pitchFamily="34" charset="-120"/>
+              </a:rPr>
+              <a:t>: a resposta a essa razão.</a:t>
             </a:r>
             <a:endParaRPr lang="en-US" sz="2300" dirty="0"/>
           </a:p>
